--- a/REI-Combinatoria/Materiales en inglés/10b - Fase opcional - Fitxa per l'alumne - Fem de hackers!.pptx
+++ b/REI-Combinatoria/Materiales en inglés/10b - Fase opcional - Fitxa per l'alumne - Fem de hackers!.pptx
@@ -34,7 +34,7 @@
   </p:embeddedFontLst>
   <p:defaultTextStyle>
     <a:defPPr>
-      <a:defRPr lang="es"/>
+      <a:defRPr lang="en"/>
     </a:defPPr>
     <a:lvl1pPr marL="0" algn="l" defTabSz="914400" rtl="0" eaLnBrk="1" latinLnBrk="0" hangingPunct="1">
       <a:defRPr sz="1800" kern="1200">
@@ -149,13 +149,37 @@
 <file path=ppt/revisionInfo.xml><?xml version="1.0" encoding="utf-8"?>
 <p1510:revInfo xmlns:a="http://schemas.openxmlformats.org/drawingml/2006/main" xmlns:r="http://schemas.openxmlformats.org/officeDocument/2006/relationships" xmlns:p1510="http://schemas.microsoft.com/office/powerpoint/2015/10/main">
   <p1510:revLst>
-    <p1510:client id="{184B16D3-0583-4B86-B9E2-32A8C8837C3C}" v="10" dt="2025-03-03T11:28:09.765"/>
+    <p1510:client id="{31F92F47-B000-47E5-B703-9A1D89C179A8}" v="1" dt="2025-10-16T17:27:36.841"/>
   </p1510:revLst>
 </p1510:revInfo>
 </file>
 
 <file path=ppt/changesInfos/changesInfo1.xml><?xml version="1.0" encoding="utf-8"?>
 <pc:chgInfo xmlns:a="http://schemas.openxmlformats.org/drawingml/2006/main" xmlns:r="http://schemas.openxmlformats.org/officeDocument/2006/relationships" xmlns:ac="http://schemas.microsoft.com/office/drawing/2013/main/command" xmlns:pc="http://schemas.microsoft.com/office/powerpoint/2013/main/command">
+  <pc:docChgLst>
+    <pc:chgData name="Susana Vasquez Elias" userId="e776416f-e583-4d77-b224-146689d50a03" providerId="ADAL" clId="{3C100498-C411-419B-B5E6-C2EF21CD595F}"/>
+    <pc:docChg chg="modSld">
+      <pc:chgData name="Susana Vasquez Elias" userId="e776416f-e583-4d77-b224-146689d50a03" providerId="ADAL" clId="{3C100498-C411-419B-B5E6-C2EF21CD595F}" dt="2025-10-16T17:27:39.915" v="1" actId="1076"/>
+      <pc:docMkLst>
+        <pc:docMk/>
+      </pc:docMkLst>
+      <pc:sldChg chg="addSp modSp mod">
+        <pc:chgData name="Susana Vasquez Elias" userId="e776416f-e583-4d77-b224-146689d50a03" providerId="ADAL" clId="{3C100498-C411-419B-B5E6-C2EF21CD595F}" dt="2025-10-16T17:27:39.915" v="1" actId="1076"/>
+        <pc:sldMkLst>
+          <pc:docMk/>
+          <pc:sldMk cId="0" sldId="256"/>
+        </pc:sldMkLst>
+        <pc:picChg chg="add mod">
+          <ac:chgData name="Susana Vasquez Elias" userId="e776416f-e583-4d77-b224-146689d50a03" providerId="ADAL" clId="{3C100498-C411-419B-B5E6-C2EF21CD595F}" dt="2025-10-16T17:27:39.915" v="1" actId="1076"/>
+          <ac:picMkLst>
+            <pc:docMk/>
+            <pc:sldMk cId="0" sldId="256"/>
+            <ac:picMk id="12" creationId="{2ADF4236-C311-988C-1EAF-F33444BF8989}"/>
+          </ac:picMkLst>
+        </pc:picChg>
+      </pc:sldChg>
+    </pc:docChg>
+  </pc:docChgLst>
   <pc:docChgLst>
     <pc:chgData name="Susana Vásquez" userId="dffc548e-2323-4ffc-a8aa-757e426c1faa" providerId="ADAL" clId="{184B16D3-0583-4B86-B9E2-32A8C8837C3C}"/>
     <pc:docChg chg="undo redo custSel modSld">
@@ -169,78 +193,6 @@
           <pc:docMk/>
           <pc:sldMk cId="0" sldId="256"/>
         </pc:sldMkLst>
-        <pc:spChg chg="mod">
-          <ac:chgData name="Susana Vásquez" userId="dffc548e-2323-4ffc-a8aa-757e426c1faa" providerId="ADAL" clId="{184B16D3-0583-4B86-B9E2-32A8C8837C3C}" dt="2025-03-03T11:23:45.408" v="1002" actId="790"/>
-          <ac:spMkLst>
-            <pc:docMk/>
-            <pc:sldMk cId="0" sldId="256"/>
-            <ac:spMk id="3" creationId="{00000000-0000-0000-0000-000000000000}"/>
-          </ac:spMkLst>
-        </pc:spChg>
-        <pc:spChg chg="mod">
-          <ac:chgData name="Susana Vásquez" userId="dffc548e-2323-4ffc-a8aa-757e426c1faa" providerId="ADAL" clId="{184B16D3-0583-4B86-B9E2-32A8C8837C3C}" dt="2025-03-03T11:23:45.408" v="1002" actId="790"/>
-          <ac:spMkLst>
-            <pc:docMk/>
-            <pc:sldMk cId="0" sldId="256"/>
-            <ac:spMk id="4" creationId="{00000000-0000-0000-0000-000000000000}"/>
-          </ac:spMkLst>
-        </pc:spChg>
-        <pc:spChg chg="mod">
-          <ac:chgData name="Susana Vásquez" userId="dffc548e-2323-4ffc-a8aa-757e426c1faa" providerId="ADAL" clId="{184B16D3-0583-4B86-B9E2-32A8C8837C3C}" dt="2025-03-03T11:23:45.408" v="1002" actId="790"/>
-          <ac:spMkLst>
-            <pc:docMk/>
-            <pc:sldMk cId="0" sldId="256"/>
-            <ac:spMk id="5" creationId="{00000000-0000-0000-0000-000000000000}"/>
-          </ac:spMkLst>
-        </pc:spChg>
-        <pc:spChg chg="mod">
-          <ac:chgData name="Susana Vásquez" userId="dffc548e-2323-4ffc-a8aa-757e426c1faa" providerId="ADAL" clId="{184B16D3-0583-4B86-B9E2-32A8C8837C3C}" dt="2025-03-03T11:23:45.408" v="1002" actId="790"/>
-          <ac:spMkLst>
-            <pc:docMk/>
-            <pc:sldMk cId="0" sldId="256"/>
-            <ac:spMk id="6" creationId="{00000000-0000-0000-0000-000000000000}"/>
-          </ac:spMkLst>
-        </pc:spChg>
-        <pc:spChg chg="mod">
-          <ac:chgData name="Susana Vásquez" userId="dffc548e-2323-4ffc-a8aa-757e426c1faa" providerId="ADAL" clId="{184B16D3-0583-4B86-B9E2-32A8C8837C3C}" dt="2025-03-03T11:23:45.408" v="1002" actId="790"/>
-          <ac:spMkLst>
-            <pc:docMk/>
-            <pc:sldMk cId="0" sldId="256"/>
-            <ac:spMk id="7" creationId="{00000000-0000-0000-0000-000000000000}"/>
-          </ac:spMkLst>
-        </pc:spChg>
-        <pc:spChg chg="mod">
-          <ac:chgData name="Susana Vásquez" userId="dffc548e-2323-4ffc-a8aa-757e426c1faa" providerId="ADAL" clId="{184B16D3-0583-4B86-B9E2-32A8C8837C3C}" dt="2025-03-03T11:23:45.408" v="1002" actId="790"/>
-          <ac:spMkLst>
-            <pc:docMk/>
-            <pc:sldMk cId="0" sldId="256"/>
-            <ac:spMk id="8" creationId="{00000000-0000-0000-0000-000000000000}"/>
-          </ac:spMkLst>
-        </pc:spChg>
-        <pc:spChg chg="mod">
-          <ac:chgData name="Susana Vásquez" userId="dffc548e-2323-4ffc-a8aa-757e426c1faa" providerId="ADAL" clId="{184B16D3-0583-4B86-B9E2-32A8C8837C3C}" dt="2025-03-03T11:23:45.408" v="1002" actId="790"/>
-          <ac:spMkLst>
-            <pc:docMk/>
-            <pc:sldMk cId="0" sldId="256"/>
-            <ac:spMk id="9" creationId="{00000000-0000-0000-0000-000000000000}"/>
-          </ac:spMkLst>
-        </pc:spChg>
-        <pc:spChg chg="mod">
-          <ac:chgData name="Susana Vásquez" userId="dffc548e-2323-4ffc-a8aa-757e426c1faa" providerId="ADAL" clId="{184B16D3-0583-4B86-B9E2-32A8C8837C3C}" dt="2025-03-03T11:23:45.408" v="1002" actId="790"/>
-          <ac:spMkLst>
-            <pc:docMk/>
-            <pc:sldMk cId="0" sldId="256"/>
-            <ac:spMk id="10" creationId="{00000000-0000-0000-0000-000000000000}"/>
-          </ac:spMkLst>
-        </pc:spChg>
-        <pc:spChg chg="mod">
-          <ac:chgData name="Susana Vásquez" userId="dffc548e-2323-4ffc-a8aa-757e426c1faa" providerId="ADAL" clId="{184B16D3-0583-4B86-B9E2-32A8C8837C3C}" dt="2025-03-03T11:23:45.408" v="1002" actId="790"/>
-          <ac:spMkLst>
-            <pc:docMk/>
-            <pc:sldMk cId="0" sldId="256"/>
-            <ac:spMk id="11" creationId="{00000000-0000-0000-0000-000000000000}"/>
-          </ac:spMkLst>
-        </pc:spChg>
       </pc:sldChg>
       <pc:sldChg chg="addSp delSp modSp mod">
         <pc:chgData name="Susana Vásquez" userId="dffc548e-2323-4ffc-a8aa-757e426c1faa" providerId="ADAL" clId="{184B16D3-0583-4B86-B9E2-32A8C8837C3C}" dt="2025-03-03T11:29:33.254" v="1128" actId="1035"/>
@@ -248,198 +200,6 @@
           <pc:docMk/>
           <pc:sldMk cId="0" sldId="257"/>
         </pc:sldMkLst>
-        <pc:spChg chg="mod">
-          <ac:chgData name="Susana Vásquez" userId="dffc548e-2323-4ffc-a8aa-757e426c1faa" providerId="ADAL" clId="{184B16D3-0583-4B86-B9E2-32A8C8837C3C}" dt="2025-03-03T11:23:45.408" v="1002" actId="790"/>
-          <ac:spMkLst>
-            <pc:docMk/>
-            <pc:sldMk cId="0" sldId="257"/>
-            <ac:spMk id="3" creationId="{00000000-0000-0000-0000-000000000000}"/>
-          </ac:spMkLst>
-        </pc:spChg>
-        <pc:spChg chg="mod">
-          <ac:chgData name="Susana Vásquez" userId="dffc548e-2323-4ffc-a8aa-757e426c1faa" providerId="ADAL" clId="{184B16D3-0583-4B86-B9E2-32A8C8837C3C}" dt="2025-03-03T11:23:45.408" v="1002" actId="790"/>
-          <ac:spMkLst>
-            <pc:docMk/>
-            <pc:sldMk cId="0" sldId="257"/>
-            <ac:spMk id="4" creationId="{00000000-0000-0000-0000-000000000000}"/>
-          </ac:spMkLst>
-        </pc:spChg>
-        <pc:spChg chg="mod">
-          <ac:chgData name="Susana Vásquez" userId="dffc548e-2323-4ffc-a8aa-757e426c1faa" providerId="ADAL" clId="{184B16D3-0583-4B86-B9E2-32A8C8837C3C}" dt="2025-03-03T11:23:45.408" v="1002" actId="790"/>
-          <ac:spMkLst>
-            <pc:docMk/>
-            <pc:sldMk cId="0" sldId="257"/>
-            <ac:spMk id="6" creationId="{00000000-0000-0000-0000-000000000000}"/>
-          </ac:spMkLst>
-        </pc:spChg>
-        <pc:spChg chg="del topLvl">
-          <ac:chgData name="Susana Vásquez" userId="dffc548e-2323-4ffc-a8aa-757e426c1faa" providerId="ADAL" clId="{184B16D3-0583-4B86-B9E2-32A8C8837C3C}" dt="2025-03-03T11:27:25.966" v="1057" actId="478"/>
-          <ac:spMkLst>
-            <pc:docMk/>
-            <pc:sldMk cId="0" sldId="257"/>
-            <ac:spMk id="10" creationId="{00000000-0000-0000-0000-000000000000}"/>
-          </ac:spMkLst>
-        </pc:spChg>
-        <pc:spChg chg="mod topLvl">
-          <ac:chgData name="Susana Vásquez" userId="dffc548e-2323-4ffc-a8aa-757e426c1faa" providerId="ADAL" clId="{184B16D3-0583-4B86-B9E2-32A8C8837C3C}" dt="2025-03-03T11:27:25.966" v="1057" actId="478"/>
-          <ac:spMkLst>
-            <pc:docMk/>
-            <pc:sldMk cId="0" sldId="257"/>
-            <ac:spMk id="11" creationId="{00000000-0000-0000-0000-000000000000}"/>
-          </ac:spMkLst>
-        </pc:spChg>
-        <pc:spChg chg="del">
-          <ac:chgData name="Susana Vásquez" userId="dffc548e-2323-4ffc-a8aa-757e426c1faa" providerId="ADAL" clId="{184B16D3-0583-4B86-B9E2-32A8C8837C3C}" dt="2025-03-03T11:27:29.134" v="1059" actId="478"/>
-          <ac:spMkLst>
-            <pc:docMk/>
-            <pc:sldMk cId="0" sldId="257"/>
-            <ac:spMk id="13" creationId="{00000000-0000-0000-0000-000000000000}"/>
-          </ac:spMkLst>
-        </pc:spChg>
-        <pc:spChg chg="mod">
-          <ac:chgData name="Susana Vásquez" userId="dffc548e-2323-4ffc-a8aa-757e426c1faa" providerId="ADAL" clId="{184B16D3-0583-4B86-B9E2-32A8C8837C3C}" dt="2025-03-03T11:23:45.408" v="1002" actId="790"/>
-          <ac:spMkLst>
-            <pc:docMk/>
-            <pc:sldMk cId="0" sldId="257"/>
-            <ac:spMk id="14" creationId="{00000000-0000-0000-0000-000000000000}"/>
-          </ac:spMkLst>
-        </pc:spChg>
-        <pc:spChg chg="mod">
-          <ac:chgData name="Susana Vásquez" userId="dffc548e-2323-4ffc-a8aa-757e426c1faa" providerId="ADAL" clId="{184B16D3-0583-4B86-B9E2-32A8C8837C3C}" dt="2025-03-03T11:23:45.408" v="1002" actId="790"/>
-          <ac:spMkLst>
-            <pc:docMk/>
-            <pc:sldMk cId="0" sldId="257"/>
-            <ac:spMk id="17" creationId="{00000000-0000-0000-0000-000000000000}"/>
-          </ac:spMkLst>
-        </pc:spChg>
-        <pc:spChg chg="mod">
-          <ac:chgData name="Susana Vásquez" userId="dffc548e-2323-4ffc-a8aa-757e426c1faa" providerId="ADAL" clId="{184B16D3-0583-4B86-B9E2-32A8C8837C3C}" dt="2025-03-03T11:29:33.254" v="1128" actId="1035"/>
-          <ac:spMkLst>
-            <pc:docMk/>
-            <pc:sldMk cId="0" sldId="257"/>
-            <ac:spMk id="23" creationId="{AAB3E5E1-62BA-DA63-3BDB-0ACFFFFD7FA6}"/>
-          </ac:spMkLst>
-        </pc:spChg>
-        <pc:spChg chg="mod">
-          <ac:chgData name="Susana Vásquez" userId="dffc548e-2323-4ffc-a8aa-757e426c1faa" providerId="ADAL" clId="{184B16D3-0583-4B86-B9E2-32A8C8837C3C}" dt="2025-03-03T11:29:33.254" v="1128" actId="1035"/>
-          <ac:spMkLst>
-            <pc:docMk/>
-            <pc:sldMk cId="0" sldId="257"/>
-            <ac:spMk id="24" creationId="{A684A2A2-3C93-5F0E-72A8-AAF7B89AA4A1}"/>
-          </ac:spMkLst>
-        </pc:spChg>
-        <pc:spChg chg="mod">
-          <ac:chgData name="Susana Vásquez" userId="dffc548e-2323-4ffc-a8aa-757e426c1faa" providerId="ADAL" clId="{184B16D3-0583-4B86-B9E2-32A8C8837C3C}" dt="2025-03-03T11:29:33.254" v="1128" actId="1035"/>
-          <ac:spMkLst>
-            <pc:docMk/>
-            <pc:sldMk cId="0" sldId="257"/>
-            <ac:spMk id="25" creationId="{CE3EA57C-A5B9-14A8-D529-64B22CC3A16C}"/>
-          </ac:spMkLst>
-        </pc:spChg>
-        <pc:spChg chg="mod">
-          <ac:chgData name="Susana Vásquez" userId="dffc548e-2323-4ffc-a8aa-757e426c1faa" providerId="ADAL" clId="{184B16D3-0583-4B86-B9E2-32A8C8837C3C}" dt="2025-03-03T11:29:33.254" v="1128" actId="1035"/>
-          <ac:spMkLst>
-            <pc:docMk/>
-            <pc:sldMk cId="0" sldId="257"/>
-            <ac:spMk id="26" creationId="{E59A3058-7D71-D6C6-EF1A-4FE1569C3818}"/>
-          </ac:spMkLst>
-        </pc:spChg>
-        <pc:spChg chg="mod">
-          <ac:chgData name="Susana Vásquez" userId="dffc548e-2323-4ffc-a8aa-757e426c1faa" providerId="ADAL" clId="{184B16D3-0583-4B86-B9E2-32A8C8837C3C}" dt="2025-03-03T11:29:33.254" v="1128" actId="1035"/>
-          <ac:spMkLst>
-            <pc:docMk/>
-            <pc:sldMk cId="0" sldId="257"/>
-            <ac:spMk id="27" creationId="{6E62626F-E9C1-B45D-4F3C-480904DC9404}"/>
-          </ac:spMkLst>
-        </pc:spChg>
-        <pc:spChg chg="mod">
-          <ac:chgData name="Susana Vásquez" userId="dffc548e-2323-4ffc-a8aa-757e426c1faa" providerId="ADAL" clId="{184B16D3-0583-4B86-B9E2-32A8C8837C3C}" dt="2025-03-03T11:29:33.254" v="1128" actId="1035"/>
-          <ac:spMkLst>
-            <pc:docMk/>
-            <pc:sldMk cId="0" sldId="257"/>
-            <ac:spMk id="28" creationId="{B3C556D5-62EF-1CBB-B17D-8B9A1E32325A}"/>
-          </ac:spMkLst>
-        </pc:spChg>
-        <pc:spChg chg="mod">
-          <ac:chgData name="Susana Vásquez" userId="dffc548e-2323-4ffc-a8aa-757e426c1faa" providerId="ADAL" clId="{184B16D3-0583-4B86-B9E2-32A8C8837C3C}" dt="2025-03-03T11:27:26.496" v="1058"/>
-          <ac:spMkLst>
-            <pc:docMk/>
-            <pc:sldMk cId="0" sldId="257"/>
-            <ac:spMk id="29" creationId="{68D85D8D-1CDF-095B-CC07-D5412653C181}"/>
-          </ac:spMkLst>
-        </pc:spChg>
-        <pc:spChg chg="mod">
-          <ac:chgData name="Susana Vásquez" userId="dffc548e-2323-4ffc-a8aa-757e426c1faa" providerId="ADAL" clId="{184B16D3-0583-4B86-B9E2-32A8C8837C3C}" dt="2025-03-03T11:27:26.496" v="1058"/>
-          <ac:spMkLst>
-            <pc:docMk/>
-            <pc:sldMk cId="0" sldId="257"/>
-            <ac:spMk id="30" creationId="{6D1F6E63-7960-2EE8-FB4B-898E27761466}"/>
-          </ac:spMkLst>
-        </pc:spChg>
-        <pc:spChg chg="add mod">
-          <ac:chgData name="Susana Vásquez" userId="dffc548e-2323-4ffc-a8aa-757e426c1faa" providerId="ADAL" clId="{184B16D3-0583-4B86-B9E2-32A8C8837C3C}" dt="2025-03-03T11:27:26.496" v="1058"/>
-          <ac:spMkLst>
-            <pc:docMk/>
-            <pc:sldMk cId="0" sldId="257"/>
-            <ac:spMk id="31" creationId="{1C2E7D07-B7C9-667D-0CBE-E17737339E92}"/>
-          </ac:spMkLst>
-        </pc:spChg>
-        <pc:spChg chg="mod">
-          <ac:chgData name="Susana Vásquez" userId="dffc548e-2323-4ffc-a8aa-757e426c1faa" providerId="ADAL" clId="{184B16D3-0583-4B86-B9E2-32A8C8837C3C}" dt="2025-03-03T11:27:29.444" v="1060"/>
-          <ac:spMkLst>
-            <pc:docMk/>
-            <pc:sldMk cId="0" sldId="257"/>
-            <ac:spMk id="33" creationId="{B776ADD1-60B7-198F-3505-D95F4DC7D832}"/>
-          </ac:spMkLst>
-        </pc:spChg>
-        <pc:spChg chg="mod">
-          <ac:chgData name="Susana Vásquez" userId="dffc548e-2323-4ffc-a8aa-757e426c1faa" providerId="ADAL" clId="{184B16D3-0583-4B86-B9E2-32A8C8837C3C}" dt="2025-03-03T11:27:29.444" v="1060"/>
-          <ac:spMkLst>
-            <pc:docMk/>
-            <pc:sldMk cId="0" sldId="257"/>
-            <ac:spMk id="34" creationId="{725260EB-0900-5B24-DFFC-EB9B39311B61}"/>
-          </ac:spMkLst>
-        </pc:spChg>
-        <pc:spChg chg="add mod">
-          <ac:chgData name="Susana Vásquez" userId="dffc548e-2323-4ffc-a8aa-757e426c1faa" providerId="ADAL" clId="{184B16D3-0583-4B86-B9E2-32A8C8837C3C}" dt="2025-03-03T11:27:29.444" v="1060"/>
-          <ac:spMkLst>
-            <pc:docMk/>
-            <pc:sldMk cId="0" sldId="257"/>
-            <ac:spMk id="35" creationId="{A3694D6D-CA9F-89A1-C8DD-B58D742C2EC7}"/>
-          </ac:spMkLst>
-        </pc:spChg>
-        <pc:grpChg chg="add del">
-          <ac:chgData name="Susana Vásquez" userId="dffc548e-2323-4ffc-a8aa-757e426c1faa" providerId="ADAL" clId="{184B16D3-0583-4B86-B9E2-32A8C8837C3C}" dt="2025-03-03T11:27:25.966" v="1057" actId="478"/>
-          <ac:grpSpMkLst>
-            <pc:docMk/>
-            <pc:sldMk cId="0" sldId="257"/>
-            <ac:grpSpMk id="9" creationId="{00000000-0000-0000-0000-000000000000}"/>
-          </ac:grpSpMkLst>
-        </pc:grpChg>
-        <pc:grpChg chg="add mod">
-          <ac:chgData name="Susana Vásquez" userId="dffc548e-2323-4ffc-a8aa-757e426c1faa" providerId="ADAL" clId="{184B16D3-0583-4B86-B9E2-32A8C8837C3C}" dt="2025-03-03T11:27:26.496" v="1058"/>
-          <ac:grpSpMkLst>
-            <pc:docMk/>
-            <pc:sldMk cId="0" sldId="257"/>
-            <ac:grpSpMk id="12" creationId="{4C3199BC-29FB-200F-D4EA-628532A62C29}"/>
-          </ac:grpSpMkLst>
-        </pc:grpChg>
-        <pc:grpChg chg="del">
-          <ac:chgData name="Susana Vásquez" userId="dffc548e-2323-4ffc-a8aa-757e426c1faa" providerId="ADAL" clId="{184B16D3-0583-4B86-B9E2-32A8C8837C3C}" dt="2025-03-03T11:27:19.915" v="1054" actId="478"/>
-          <ac:grpSpMkLst>
-            <pc:docMk/>
-            <pc:sldMk cId="0" sldId="257"/>
-            <ac:grpSpMk id="15" creationId="{00000000-0000-0000-0000-000000000000}"/>
-          </ac:grpSpMkLst>
-        </pc:grpChg>
-        <pc:grpChg chg="add mod">
-          <ac:chgData name="Susana Vásquez" userId="dffc548e-2323-4ffc-a8aa-757e426c1faa" providerId="ADAL" clId="{184B16D3-0583-4B86-B9E2-32A8C8837C3C}" dt="2025-03-03T11:27:29.444" v="1060"/>
-          <ac:grpSpMkLst>
-            <pc:docMk/>
-            <pc:sldMk cId="0" sldId="257"/>
-            <ac:grpSpMk id="32" creationId="{1975CA51-EF1D-03A7-D7CD-47E654EAEA04}"/>
-          </ac:grpSpMkLst>
-        </pc:grpChg>
       </pc:sldChg>
       <pc:sldChg chg="addSp modSp mod">
         <pc:chgData name="Susana Vásquez" userId="dffc548e-2323-4ffc-a8aa-757e426c1faa" providerId="ADAL" clId="{184B16D3-0583-4B86-B9E2-32A8C8837C3C}" dt="2025-03-03T11:28:08.158" v="1068" actId="1076"/>
@@ -447,94 +207,6 @@
           <pc:docMk/>
           <pc:sldMk cId="0" sldId="261"/>
         </pc:sldMkLst>
-        <pc:spChg chg="mod">
-          <ac:chgData name="Susana Vásquez" userId="dffc548e-2323-4ffc-a8aa-757e426c1faa" providerId="ADAL" clId="{184B16D3-0583-4B86-B9E2-32A8C8837C3C}" dt="2025-03-03T11:23:45.408" v="1002" actId="790"/>
-          <ac:spMkLst>
-            <pc:docMk/>
-            <pc:sldMk cId="0" sldId="261"/>
-            <ac:spMk id="4" creationId="{00000000-0000-0000-0000-000000000000}"/>
-          </ac:spMkLst>
-        </pc:spChg>
-        <pc:spChg chg="mod">
-          <ac:chgData name="Susana Vásquez" userId="dffc548e-2323-4ffc-a8aa-757e426c1faa" providerId="ADAL" clId="{184B16D3-0583-4B86-B9E2-32A8C8837C3C}" dt="2025-03-03T11:23:45.408" v="1002" actId="790"/>
-          <ac:spMkLst>
-            <pc:docMk/>
-            <pc:sldMk cId="0" sldId="261"/>
-            <ac:spMk id="5" creationId="{00000000-0000-0000-0000-000000000000}"/>
-          </ac:spMkLst>
-        </pc:spChg>
-        <pc:spChg chg="mod">
-          <ac:chgData name="Susana Vásquez" userId="dffc548e-2323-4ffc-a8aa-757e426c1faa" providerId="ADAL" clId="{184B16D3-0583-4B86-B9E2-32A8C8837C3C}" dt="2025-03-03T11:23:45.408" v="1002" actId="790"/>
-          <ac:spMkLst>
-            <pc:docMk/>
-            <pc:sldMk cId="0" sldId="261"/>
-            <ac:spMk id="6" creationId="{00000000-0000-0000-0000-000000000000}"/>
-          </ac:spMkLst>
-        </pc:spChg>
-        <pc:spChg chg="mod">
-          <ac:chgData name="Susana Vásquez" userId="dffc548e-2323-4ffc-a8aa-757e426c1faa" providerId="ADAL" clId="{184B16D3-0583-4B86-B9E2-32A8C8837C3C}" dt="2025-03-03T11:23:45.408" v="1002" actId="790"/>
-          <ac:spMkLst>
-            <pc:docMk/>
-            <pc:sldMk cId="0" sldId="261"/>
-            <ac:spMk id="7" creationId="{00000000-0000-0000-0000-000000000000}"/>
-          </ac:spMkLst>
-        </pc:spChg>
-        <pc:spChg chg="mod">
-          <ac:chgData name="Susana Vásquez" userId="dffc548e-2323-4ffc-a8aa-757e426c1faa" providerId="ADAL" clId="{184B16D3-0583-4B86-B9E2-32A8C8837C3C}" dt="2025-03-03T11:23:45.408" v="1002" actId="790"/>
-          <ac:spMkLst>
-            <pc:docMk/>
-            <pc:sldMk cId="0" sldId="261"/>
-            <ac:spMk id="8" creationId="{00000000-0000-0000-0000-000000000000}"/>
-          </ac:spMkLst>
-        </pc:spChg>
-        <pc:spChg chg="mod">
-          <ac:chgData name="Susana Vásquez" userId="dffc548e-2323-4ffc-a8aa-757e426c1faa" providerId="ADAL" clId="{184B16D3-0583-4B86-B9E2-32A8C8837C3C}" dt="2025-03-03T11:23:45.408" v="1002" actId="790"/>
-          <ac:spMkLst>
-            <pc:docMk/>
-            <pc:sldMk cId="0" sldId="261"/>
-            <ac:spMk id="10" creationId="{00000000-0000-0000-0000-000000000000}"/>
-          </ac:spMkLst>
-        </pc:spChg>
-        <pc:spChg chg="mod">
-          <ac:chgData name="Susana Vásquez" userId="dffc548e-2323-4ffc-a8aa-757e426c1faa" providerId="ADAL" clId="{184B16D3-0583-4B86-B9E2-32A8C8837C3C}" dt="2025-03-03T11:23:45.408" v="1002" actId="790"/>
-          <ac:spMkLst>
-            <pc:docMk/>
-            <pc:sldMk cId="0" sldId="261"/>
-            <ac:spMk id="11" creationId="{00000000-0000-0000-0000-000000000000}"/>
-          </ac:spMkLst>
-        </pc:spChg>
-        <pc:spChg chg="mod">
-          <ac:chgData name="Susana Vásquez" userId="dffc548e-2323-4ffc-a8aa-757e426c1faa" providerId="ADAL" clId="{184B16D3-0583-4B86-B9E2-32A8C8837C3C}" dt="2025-03-03T11:23:45.408" v="1002" actId="790"/>
-          <ac:spMkLst>
-            <pc:docMk/>
-            <pc:sldMk cId="0" sldId="261"/>
-            <ac:spMk id="16" creationId="{00000000-0000-0000-0000-000000000000}"/>
-          </ac:spMkLst>
-        </pc:spChg>
-        <pc:spChg chg="mod">
-          <ac:chgData name="Susana Vásquez" userId="dffc548e-2323-4ffc-a8aa-757e426c1faa" providerId="ADAL" clId="{184B16D3-0583-4B86-B9E2-32A8C8837C3C}" dt="2025-03-03T11:23:45.408" v="1002" actId="790"/>
-          <ac:spMkLst>
-            <pc:docMk/>
-            <pc:sldMk cId="0" sldId="261"/>
-            <ac:spMk id="18" creationId="{00000000-0000-0000-0000-000000000000}"/>
-          </ac:spMkLst>
-        </pc:spChg>
-        <pc:spChg chg="mod">
-          <ac:chgData name="Susana Vásquez" userId="dffc548e-2323-4ffc-a8aa-757e426c1faa" providerId="ADAL" clId="{184B16D3-0583-4B86-B9E2-32A8C8837C3C}" dt="2025-03-03T11:23:45.408" v="1002" actId="790"/>
-          <ac:spMkLst>
-            <pc:docMk/>
-            <pc:sldMk cId="0" sldId="261"/>
-            <ac:spMk id="20" creationId="{4873AF9D-5F3B-74AE-EFB1-E907E9FBBAB9}"/>
-          </ac:spMkLst>
-        </pc:spChg>
-        <pc:graphicFrameChg chg="add mod">
-          <ac:chgData name="Susana Vásquez" userId="dffc548e-2323-4ffc-a8aa-757e426c1faa" providerId="ADAL" clId="{184B16D3-0583-4B86-B9E2-32A8C8837C3C}" dt="2025-03-03T11:28:08.158" v="1068" actId="1076"/>
-          <ac:graphicFrameMkLst>
-            <pc:docMk/>
-            <pc:sldMk cId="0" sldId="261"/>
-            <ac:graphicFrameMk id="19" creationId="{FE62FC96-8B65-76F3-5513-CC1BE6CFEC34}"/>
-          </ac:graphicFrameMkLst>
-        </pc:graphicFrameChg>
       </pc:sldChg>
       <pc:sldChg chg="addSp delSp modSp mod">
         <pc:chgData name="Susana Vásquez" userId="dffc548e-2323-4ffc-a8aa-757e426c1faa" providerId="ADAL" clId="{184B16D3-0583-4B86-B9E2-32A8C8837C3C}" dt="2025-03-03T11:27:49.542" v="1066"/>
@@ -542,158 +214,6 @@
           <pc:docMk/>
           <pc:sldMk cId="4076031532" sldId="275"/>
         </pc:sldMkLst>
-        <pc:spChg chg="mod">
-          <ac:chgData name="Susana Vásquez" userId="dffc548e-2323-4ffc-a8aa-757e426c1faa" providerId="ADAL" clId="{184B16D3-0583-4B86-B9E2-32A8C8837C3C}" dt="2025-03-03T11:23:45.408" v="1002" actId="790"/>
-          <ac:spMkLst>
-            <pc:docMk/>
-            <pc:sldMk cId="4076031532" sldId="275"/>
-            <ac:spMk id="3" creationId="{759FA59C-C289-9543-5201-E1F1B46C2BEA}"/>
-          </ac:spMkLst>
-        </pc:spChg>
-        <pc:spChg chg="mod">
-          <ac:chgData name="Susana Vásquez" userId="dffc548e-2323-4ffc-a8aa-757e426c1faa" providerId="ADAL" clId="{184B16D3-0583-4B86-B9E2-32A8C8837C3C}" dt="2025-03-03T11:23:45.408" v="1002" actId="790"/>
-          <ac:spMkLst>
-            <pc:docMk/>
-            <pc:sldMk cId="4076031532" sldId="275"/>
-            <ac:spMk id="5" creationId="{BEFA780B-8C25-53ED-20E7-289D54104D70}"/>
-          </ac:spMkLst>
-        </pc:spChg>
-        <pc:spChg chg="mod">
-          <ac:chgData name="Susana Vásquez" userId="dffc548e-2323-4ffc-a8aa-757e426c1faa" providerId="ADAL" clId="{184B16D3-0583-4B86-B9E2-32A8C8837C3C}" dt="2025-03-03T11:23:45.408" v="1002" actId="790"/>
-          <ac:spMkLst>
-            <pc:docMk/>
-            <pc:sldMk cId="4076031532" sldId="275"/>
-            <ac:spMk id="6" creationId="{6523BCA3-F1CB-73A3-230B-F5CDC3772441}"/>
-          </ac:spMkLst>
-        </pc:spChg>
-        <pc:spChg chg="mod">
-          <ac:chgData name="Susana Vásquez" userId="dffc548e-2323-4ffc-a8aa-757e426c1faa" providerId="ADAL" clId="{184B16D3-0583-4B86-B9E2-32A8C8837C3C}" dt="2025-03-03T11:23:45.408" v="1002" actId="790"/>
-          <ac:spMkLst>
-            <pc:docMk/>
-            <pc:sldMk cId="4076031532" sldId="275"/>
-            <ac:spMk id="7" creationId="{637433B4-9A07-820B-91A9-AF33A0BF4BA7}"/>
-          </ac:spMkLst>
-        </pc:spChg>
-        <pc:spChg chg="mod">
-          <ac:chgData name="Susana Vásquez" userId="dffc548e-2323-4ffc-a8aa-757e426c1faa" providerId="ADAL" clId="{184B16D3-0583-4B86-B9E2-32A8C8837C3C}" dt="2025-03-03T11:23:45.408" v="1002" actId="790"/>
-          <ac:spMkLst>
-            <pc:docMk/>
-            <pc:sldMk cId="4076031532" sldId="275"/>
-            <ac:spMk id="8" creationId="{C597E2AF-29D0-90DF-2B6E-E91172FD51D7}"/>
-          </ac:spMkLst>
-        </pc:spChg>
-        <pc:spChg chg="del topLvl">
-          <ac:chgData name="Susana Vásquez" userId="dffc548e-2323-4ffc-a8aa-757e426c1faa" providerId="ADAL" clId="{184B16D3-0583-4B86-B9E2-32A8C8837C3C}" dt="2025-03-03T11:27:44.426" v="1063" actId="478"/>
-          <ac:spMkLst>
-            <pc:docMk/>
-            <pc:sldMk cId="4076031532" sldId="275"/>
-            <ac:spMk id="10" creationId="{23B8934B-135F-2AB3-5692-81DE62F378A4}"/>
-          </ac:spMkLst>
-        </pc:spChg>
-        <pc:spChg chg="topLvl">
-          <ac:chgData name="Susana Vásquez" userId="dffc548e-2323-4ffc-a8aa-757e426c1faa" providerId="ADAL" clId="{184B16D3-0583-4B86-B9E2-32A8C8837C3C}" dt="2025-03-03T11:27:44.426" v="1063" actId="478"/>
-          <ac:spMkLst>
-            <pc:docMk/>
-            <pc:sldMk cId="4076031532" sldId="275"/>
-            <ac:spMk id="11" creationId="{F883F80D-6230-CCF7-D5CF-17502D260CDD}"/>
-          </ac:spMkLst>
-        </pc:spChg>
-        <pc:spChg chg="del mod">
-          <ac:chgData name="Susana Vásquez" userId="dffc548e-2323-4ffc-a8aa-757e426c1faa" providerId="ADAL" clId="{184B16D3-0583-4B86-B9E2-32A8C8837C3C}" dt="2025-03-03T11:27:47.643" v="1064" actId="478"/>
-          <ac:spMkLst>
-            <pc:docMk/>
-            <pc:sldMk cId="4076031532" sldId="275"/>
-            <ac:spMk id="13" creationId="{2A8DB375-7F54-303B-78FA-E50E53B764E5}"/>
-          </ac:spMkLst>
-        </pc:spChg>
-        <pc:spChg chg="mod">
-          <ac:chgData name="Susana Vásquez" userId="dffc548e-2323-4ffc-a8aa-757e426c1faa" providerId="ADAL" clId="{184B16D3-0583-4B86-B9E2-32A8C8837C3C}" dt="2025-03-03T11:26:50.569" v="1053" actId="20577"/>
-          <ac:spMkLst>
-            <pc:docMk/>
-            <pc:sldMk cId="4076031532" sldId="275"/>
-            <ac:spMk id="14" creationId="{0C9D3D7C-B91A-D9ED-9DA8-D0DEA3875568}"/>
-          </ac:spMkLst>
-        </pc:spChg>
-        <pc:spChg chg="mod">
-          <ac:chgData name="Susana Vásquez" userId="dffc548e-2323-4ffc-a8aa-757e426c1faa" providerId="ADAL" clId="{184B16D3-0583-4B86-B9E2-32A8C8837C3C}" dt="2025-03-03T11:23:45.408" v="1002" actId="790"/>
-          <ac:spMkLst>
-            <pc:docMk/>
-            <pc:sldMk cId="4076031532" sldId="275"/>
-            <ac:spMk id="16" creationId="{4F21CBC5-A638-C7E7-3680-842FB6B34F91}"/>
-          </ac:spMkLst>
-        </pc:spChg>
-        <pc:spChg chg="mod">
-          <ac:chgData name="Susana Vásquez" userId="dffc548e-2323-4ffc-a8aa-757e426c1faa" providerId="ADAL" clId="{184B16D3-0583-4B86-B9E2-32A8C8837C3C}" dt="2025-03-03T11:23:45.408" v="1002" actId="790"/>
-          <ac:spMkLst>
-            <pc:docMk/>
-            <pc:sldMk cId="4076031532" sldId="275"/>
-            <ac:spMk id="17" creationId="{EBACB67A-6094-3D82-D471-37306623B5B0}"/>
-          </ac:spMkLst>
-        </pc:spChg>
-        <pc:spChg chg="mod">
-          <ac:chgData name="Susana Vásquez" userId="dffc548e-2323-4ffc-a8aa-757e426c1faa" providerId="ADAL" clId="{184B16D3-0583-4B86-B9E2-32A8C8837C3C}" dt="2025-03-03T11:27:49.542" v="1066"/>
-          <ac:spMkLst>
-            <pc:docMk/>
-            <pc:sldMk cId="4076031532" sldId="275"/>
-            <ac:spMk id="20" creationId="{587E4C34-10B4-A5F2-0A8A-FA9EE4696BC4}"/>
-          </ac:spMkLst>
-        </pc:spChg>
-        <pc:spChg chg="mod">
-          <ac:chgData name="Susana Vásquez" userId="dffc548e-2323-4ffc-a8aa-757e426c1faa" providerId="ADAL" clId="{184B16D3-0583-4B86-B9E2-32A8C8837C3C}" dt="2025-03-03T11:27:49.542" v="1066"/>
-          <ac:spMkLst>
-            <pc:docMk/>
-            <pc:sldMk cId="4076031532" sldId="275"/>
-            <ac:spMk id="21" creationId="{8A7D686F-F5E6-CB3A-D1F4-E0A2A4282BC0}"/>
-          </ac:spMkLst>
-        </pc:spChg>
-        <pc:spChg chg="add mod">
-          <ac:chgData name="Susana Vásquez" userId="dffc548e-2323-4ffc-a8aa-757e426c1faa" providerId="ADAL" clId="{184B16D3-0583-4B86-B9E2-32A8C8837C3C}" dt="2025-03-03T11:27:49.542" v="1066"/>
-          <ac:spMkLst>
-            <pc:docMk/>
-            <pc:sldMk cId="4076031532" sldId="275"/>
-            <ac:spMk id="22" creationId="{5A222DCC-0637-1EB4-1A99-A7C543670384}"/>
-          </ac:spMkLst>
-        </pc:spChg>
-        <pc:spChg chg="mod">
-          <ac:chgData name="Susana Vásquez" userId="dffc548e-2323-4ffc-a8aa-757e426c1faa" providerId="ADAL" clId="{184B16D3-0583-4B86-B9E2-32A8C8837C3C}" dt="2025-03-03T11:23:45.408" v="1002" actId="790"/>
-          <ac:spMkLst>
-            <pc:docMk/>
-            <pc:sldMk cId="4076031532" sldId="275"/>
-            <ac:spMk id="29" creationId="{A74710B7-8D4B-5FCF-C98C-03751F622F15}"/>
-          </ac:spMkLst>
-        </pc:spChg>
-        <pc:spChg chg="mod">
-          <ac:chgData name="Susana Vásquez" userId="dffc548e-2323-4ffc-a8aa-757e426c1faa" providerId="ADAL" clId="{184B16D3-0583-4B86-B9E2-32A8C8837C3C}" dt="2025-03-03T11:23:45.408" v="1002" actId="790"/>
-          <ac:spMkLst>
-            <pc:docMk/>
-            <pc:sldMk cId="4076031532" sldId="275"/>
-            <ac:spMk id="30" creationId="{96EC8075-DFE8-8870-E444-7D868A5B9A8B}"/>
-          </ac:spMkLst>
-        </pc:spChg>
-        <pc:grpChg chg="add del">
-          <ac:chgData name="Susana Vásquez" userId="dffc548e-2323-4ffc-a8aa-757e426c1faa" providerId="ADAL" clId="{184B16D3-0583-4B86-B9E2-32A8C8837C3C}" dt="2025-03-03T11:27:44.426" v="1063" actId="478"/>
-          <ac:grpSpMkLst>
-            <pc:docMk/>
-            <pc:sldMk cId="4076031532" sldId="275"/>
-            <ac:grpSpMk id="9" creationId="{02EFE059-1AA4-1EB0-E17D-FE346445E552}"/>
-          </ac:grpSpMkLst>
-        </pc:grpChg>
-        <pc:grpChg chg="del">
-          <ac:chgData name="Susana Vásquez" userId="dffc548e-2323-4ffc-a8aa-757e426c1faa" providerId="ADAL" clId="{184B16D3-0583-4B86-B9E2-32A8C8837C3C}" dt="2025-03-03T11:27:49.195" v="1065" actId="478"/>
-          <ac:grpSpMkLst>
-            <pc:docMk/>
-            <pc:sldMk cId="4076031532" sldId="275"/>
-            <ac:grpSpMk id="15" creationId="{D562705E-755F-EF58-7147-FFF120113C4B}"/>
-          </ac:grpSpMkLst>
-        </pc:grpChg>
-        <pc:grpChg chg="add mod">
-          <ac:chgData name="Susana Vásquez" userId="dffc548e-2323-4ffc-a8aa-757e426c1faa" providerId="ADAL" clId="{184B16D3-0583-4B86-B9E2-32A8C8837C3C}" dt="2025-03-03T11:27:49.542" v="1066"/>
-          <ac:grpSpMkLst>
-            <pc:docMk/>
-            <pc:sldMk cId="4076031532" sldId="275"/>
-            <ac:grpSpMk id="19" creationId="{95633102-63E3-2386-94EC-777E92D87123}"/>
-          </ac:grpSpMkLst>
-        </pc:grpChg>
       </pc:sldChg>
       <pc:sldChg chg="addSp modSp mod">
         <pc:chgData name="Susana Vásquez" userId="dffc548e-2323-4ffc-a8aa-757e426c1faa" providerId="ADAL" clId="{184B16D3-0583-4B86-B9E2-32A8C8837C3C}" dt="2025-03-03T11:28:13.747" v="1070" actId="1076"/>
@@ -701,94 +221,6 @@
           <pc:docMk/>
           <pc:sldMk cId="75129213" sldId="276"/>
         </pc:sldMkLst>
-        <pc:spChg chg="mod">
-          <ac:chgData name="Susana Vásquez" userId="dffc548e-2323-4ffc-a8aa-757e426c1faa" providerId="ADAL" clId="{184B16D3-0583-4B86-B9E2-32A8C8837C3C}" dt="2025-03-03T11:23:45.408" v="1002" actId="790"/>
-          <ac:spMkLst>
-            <pc:docMk/>
-            <pc:sldMk cId="75129213" sldId="276"/>
-            <ac:spMk id="3" creationId="{12AFFB44-F5C2-A7A4-B2E9-C7EFDCEA7E31}"/>
-          </ac:spMkLst>
-        </pc:spChg>
-        <pc:spChg chg="mod">
-          <ac:chgData name="Susana Vásquez" userId="dffc548e-2323-4ffc-a8aa-757e426c1faa" providerId="ADAL" clId="{184B16D3-0583-4B86-B9E2-32A8C8837C3C}" dt="2025-03-03T11:23:45.408" v="1002" actId="790"/>
-          <ac:spMkLst>
-            <pc:docMk/>
-            <pc:sldMk cId="75129213" sldId="276"/>
-            <ac:spMk id="4" creationId="{553A5A7C-93D6-7520-E043-EC0626AEA699}"/>
-          </ac:spMkLst>
-        </pc:spChg>
-        <pc:spChg chg="mod">
-          <ac:chgData name="Susana Vásquez" userId="dffc548e-2323-4ffc-a8aa-757e426c1faa" providerId="ADAL" clId="{184B16D3-0583-4B86-B9E2-32A8C8837C3C}" dt="2025-03-03T11:23:45.408" v="1002" actId="790"/>
-          <ac:spMkLst>
-            <pc:docMk/>
-            <pc:sldMk cId="75129213" sldId="276"/>
-            <ac:spMk id="7" creationId="{D388A215-4C8E-71AC-7004-573F245D3D04}"/>
-          </ac:spMkLst>
-        </pc:spChg>
-        <pc:spChg chg="mod">
-          <ac:chgData name="Susana Vásquez" userId="dffc548e-2323-4ffc-a8aa-757e426c1faa" providerId="ADAL" clId="{184B16D3-0583-4B86-B9E2-32A8C8837C3C}" dt="2025-03-03T11:23:45.408" v="1002" actId="790"/>
-          <ac:spMkLst>
-            <pc:docMk/>
-            <pc:sldMk cId="75129213" sldId="276"/>
-            <ac:spMk id="8" creationId="{02B70CCF-F59D-F7DD-C590-8A1C93FE72E1}"/>
-          </ac:spMkLst>
-        </pc:spChg>
-        <pc:spChg chg="mod">
-          <ac:chgData name="Susana Vásquez" userId="dffc548e-2323-4ffc-a8aa-757e426c1faa" providerId="ADAL" clId="{184B16D3-0583-4B86-B9E2-32A8C8837C3C}" dt="2025-03-03T11:23:45.408" v="1002" actId="790"/>
-          <ac:spMkLst>
-            <pc:docMk/>
-            <pc:sldMk cId="75129213" sldId="276"/>
-            <ac:spMk id="10" creationId="{70F5B85D-4EC8-9D13-D1D5-99D719D125BF}"/>
-          </ac:spMkLst>
-        </pc:spChg>
-        <pc:spChg chg="mod">
-          <ac:chgData name="Susana Vásquez" userId="dffc548e-2323-4ffc-a8aa-757e426c1faa" providerId="ADAL" clId="{184B16D3-0583-4B86-B9E2-32A8C8837C3C}" dt="2025-03-03T11:23:45.408" v="1002" actId="790"/>
-          <ac:spMkLst>
-            <pc:docMk/>
-            <pc:sldMk cId="75129213" sldId="276"/>
-            <ac:spMk id="11" creationId="{6290A7D6-706C-61C7-F91D-E568B9983EF7}"/>
-          </ac:spMkLst>
-        </pc:spChg>
-        <pc:spChg chg="mod">
-          <ac:chgData name="Susana Vásquez" userId="dffc548e-2323-4ffc-a8aa-757e426c1faa" providerId="ADAL" clId="{184B16D3-0583-4B86-B9E2-32A8C8837C3C}" dt="2025-03-03T11:23:45.408" v="1002" actId="790"/>
-          <ac:spMkLst>
-            <pc:docMk/>
-            <pc:sldMk cId="75129213" sldId="276"/>
-            <ac:spMk id="13" creationId="{4F4120BF-9BB6-4F26-50A1-B63C68F5C816}"/>
-          </ac:spMkLst>
-        </pc:spChg>
-        <pc:spChg chg="mod">
-          <ac:chgData name="Susana Vásquez" userId="dffc548e-2323-4ffc-a8aa-757e426c1faa" providerId="ADAL" clId="{184B16D3-0583-4B86-B9E2-32A8C8837C3C}" dt="2025-03-03T11:23:45.408" v="1002" actId="790"/>
-          <ac:spMkLst>
-            <pc:docMk/>
-            <pc:sldMk cId="75129213" sldId="276"/>
-            <ac:spMk id="14" creationId="{4DD67EE6-D22D-99D7-8482-C4D804F5571E}"/>
-          </ac:spMkLst>
-        </pc:spChg>
-        <pc:spChg chg="mod">
-          <ac:chgData name="Susana Vásquez" userId="dffc548e-2323-4ffc-a8aa-757e426c1faa" providerId="ADAL" clId="{184B16D3-0583-4B86-B9E2-32A8C8837C3C}" dt="2025-03-03T11:23:45.408" v="1002" actId="790"/>
-          <ac:spMkLst>
-            <pc:docMk/>
-            <pc:sldMk cId="75129213" sldId="276"/>
-            <ac:spMk id="17" creationId="{C38C61D7-3ECB-FF7E-1E26-48C6AB006CE9}"/>
-          </ac:spMkLst>
-        </pc:spChg>
-        <pc:spChg chg="mod">
-          <ac:chgData name="Susana Vásquez" userId="dffc548e-2323-4ffc-a8aa-757e426c1faa" providerId="ADAL" clId="{184B16D3-0583-4B86-B9E2-32A8C8837C3C}" dt="2025-03-03T11:23:45.408" v="1002" actId="790"/>
-          <ac:spMkLst>
-            <pc:docMk/>
-            <pc:sldMk cId="75129213" sldId="276"/>
-            <ac:spMk id="20" creationId="{801AEE38-CEC5-7ED8-3342-E42F5140A57F}"/>
-          </ac:spMkLst>
-        </pc:spChg>
-        <pc:graphicFrameChg chg="add mod">
-          <ac:chgData name="Susana Vásquez" userId="dffc548e-2323-4ffc-a8aa-757e426c1faa" providerId="ADAL" clId="{184B16D3-0583-4B86-B9E2-32A8C8837C3C}" dt="2025-03-03T11:28:13.747" v="1070" actId="1076"/>
-          <ac:graphicFrameMkLst>
-            <pc:docMk/>
-            <pc:sldMk cId="75129213" sldId="276"/>
-            <ac:graphicFrameMk id="19" creationId="{5533EBFC-C8DD-826F-E8D6-6F47B7619B4C}"/>
-          </ac:graphicFrameMkLst>
-        </pc:graphicFrameChg>
       </pc:sldChg>
       <pc:sldChg chg="modSp mod">
         <pc:chgData name="Susana Vásquez" userId="dffc548e-2323-4ffc-a8aa-757e426c1faa" providerId="ADAL" clId="{184B16D3-0583-4B86-B9E2-32A8C8837C3C}" dt="2025-03-03T11:24:07.047" v="1005" actId="12"/>
@@ -796,94 +228,6 @@
           <pc:docMk/>
           <pc:sldMk cId="823424723" sldId="277"/>
         </pc:sldMkLst>
-        <pc:spChg chg="mod">
-          <ac:chgData name="Susana Vásquez" userId="dffc548e-2323-4ffc-a8aa-757e426c1faa" providerId="ADAL" clId="{184B16D3-0583-4B86-B9E2-32A8C8837C3C}" dt="2025-03-03T11:23:45.408" v="1002" actId="790"/>
-          <ac:spMkLst>
-            <pc:docMk/>
-            <pc:sldMk cId="823424723" sldId="277"/>
-            <ac:spMk id="3" creationId="{E3E8C6CC-D0C8-6B00-E41E-A00D909FFA93}"/>
-          </ac:spMkLst>
-        </pc:spChg>
-        <pc:spChg chg="mod">
-          <ac:chgData name="Susana Vásquez" userId="dffc548e-2323-4ffc-a8aa-757e426c1faa" providerId="ADAL" clId="{184B16D3-0583-4B86-B9E2-32A8C8837C3C}" dt="2025-03-03T11:23:45.408" v="1002" actId="790"/>
-          <ac:spMkLst>
-            <pc:docMk/>
-            <pc:sldMk cId="823424723" sldId="277"/>
-            <ac:spMk id="5" creationId="{491E1CD9-124E-5DC1-EB03-E524220BCBB0}"/>
-          </ac:spMkLst>
-        </pc:spChg>
-        <pc:spChg chg="mod">
-          <ac:chgData name="Susana Vásquez" userId="dffc548e-2323-4ffc-a8aa-757e426c1faa" providerId="ADAL" clId="{184B16D3-0583-4B86-B9E2-32A8C8837C3C}" dt="2025-03-03T11:23:45.408" v="1002" actId="790"/>
-          <ac:spMkLst>
-            <pc:docMk/>
-            <pc:sldMk cId="823424723" sldId="277"/>
-            <ac:spMk id="6" creationId="{3B4D39DE-A450-6EBF-6C9A-FC31116D04AB}"/>
-          </ac:spMkLst>
-        </pc:spChg>
-        <pc:spChg chg="mod">
-          <ac:chgData name="Susana Vásquez" userId="dffc548e-2323-4ffc-a8aa-757e426c1faa" providerId="ADAL" clId="{184B16D3-0583-4B86-B9E2-32A8C8837C3C}" dt="2025-03-03T11:23:45.408" v="1002" actId="790"/>
-          <ac:spMkLst>
-            <pc:docMk/>
-            <pc:sldMk cId="823424723" sldId="277"/>
-            <ac:spMk id="7" creationId="{BAD6B038-8C96-6681-3E28-E130722E4652}"/>
-          </ac:spMkLst>
-        </pc:spChg>
-        <pc:spChg chg="mod">
-          <ac:chgData name="Susana Vásquez" userId="dffc548e-2323-4ffc-a8aa-757e426c1faa" providerId="ADAL" clId="{184B16D3-0583-4B86-B9E2-32A8C8837C3C}" dt="2025-03-03T11:23:45.408" v="1002" actId="790"/>
-          <ac:spMkLst>
-            <pc:docMk/>
-            <pc:sldMk cId="823424723" sldId="277"/>
-            <ac:spMk id="8" creationId="{7CFDB6C7-C02E-D9A9-E446-3DAC3D24797D}"/>
-          </ac:spMkLst>
-        </pc:spChg>
-        <pc:spChg chg="mod">
-          <ac:chgData name="Susana Vásquez" userId="dffc548e-2323-4ffc-a8aa-757e426c1faa" providerId="ADAL" clId="{184B16D3-0583-4B86-B9E2-32A8C8837C3C}" dt="2025-03-03T11:23:45.408" v="1002" actId="790"/>
-          <ac:spMkLst>
-            <pc:docMk/>
-            <pc:sldMk cId="823424723" sldId="277"/>
-            <ac:spMk id="11" creationId="{D5379536-8E4E-49AE-87DD-CFA5A44A4901}"/>
-          </ac:spMkLst>
-        </pc:spChg>
-        <pc:spChg chg="mod">
-          <ac:chgData name="Susana Vásquez" userId="dffc548e-2323-4ffc-a8aa-757e426c1faa" providerId="ADAL" clId="{184B16D3-0583-4B86-B9E2-32A8C8837C3C}" dt="2025-03-03T11:23:45.408" v="1002" actId="790"/>
-          <ac:spMkLst>
-            <pc:docMk/>
-            <pc:sldMk cId="823424723" sldId="277"/>
-            <ac:spMk id="13" creationId="{2A669FD6-086D-42FC-54FF-47A3E8326214}"/>
-          </ac:spMkLst>
-        </pc:spChg>
-        <pc:spChg chg="mod">
-          <ac:chgData name="Susana Vásquez" userId="dffc548e-2323-4ffc-a8aa-757e426c1faa" providerId="ADAL" clId="{184B16D3-0583-4B86-B9E2-32A8C8837C3C}" dt="2025-03-03T11:23:45.408" v="1002" actId="790"/>
-          <ac:spMkLst>
-            <pc:docMk/>
-            <pc:sldMk cId="823424723" sldId="277"/>
-            <ac:spMk id="14" creationId="{572AE04F-30B1-5A2F-9ED8-6AA7FE5ABE75}"/>
-          </ac:spMkLst>
-        </pc:spChg>
-        <pc:spChg chg="mod">
-          <ac:chgData name="Susana Vásquez" userId="dffc548e-2323-4ffc-a8aa-757e426c1faa" providerId="ADAL" clId="{184B16D3-0583-4B86-B9E2-32A8C8837C3C}" dt="2025-03-03T11:23:45.408" v="1002" actId="790"/>
-          <ac:spMkLst>
-            <pc:docMk/>
-            <pc:sldMk cId="823424723" sldId="277"/>
-            <ac:spMk id="18" creationId="{36FCF92C-63DB-93ED-CD06-7D33E5FB3897}"/>
-          </ac:spMkLst>
-        </pc:spChg>
-        <pc:spChg chg="mod">
-          <ac:chgData name="Susana Vásquez" userId="dffc548e-2323-4ffc-a8aa-757e426c1faa" providerId="ADAL" clId="{184B16D3-0583-4B86-B9E2-32A8C8837C3C}" dt="2025-03-03T11:23:45.408" v="1002" actId="790"/>
-          <ac:spMkLst>
-            <pc:docMk/>
-            <pc:sldMk cId="823424723" sldId="277"/>
-            <ac:spMk id="19" creationId="{5B79CE0C-3FF6-0250-D3F9-70ADD509C8AE}"/>
-          </ac:spMkLst>
-        </pc:spChg>
-        <pc:graphicFrameChg chg="mod modGraphic">
-          <ac:chgData name="Susana Vásquez" userId="dffc548e-2323-4ffc-a8aa-757e426c1faa" providerId="ADAL" clId="{184B16D3-0583-4B86-B9E2-32A8C8837C3C}" dt="2025-03-03T11:24:07.047" v="1005" actId="12"/>
-          <ac:graphicFrameMkLst>
-            <pc:docMk/>
-            <pc:sldMk cId="823424723" sldId="277"/>
-            <ac:graphicFrameMk id="22" creationId="{122C398A-54E7-C8D0-A32D-61CC4F3C6769}"/>
-          </ac:graphicFrameMkLst>
-        </pc:graphicFrameChg>
       </pc:sldChg>
     </pc:docChg>
   </pc:docChgLst>
@@ -1070,7 +414,7 @@
             <a:fld id="{1D8BD707-D9CF-40AE-B4C6-C98DA3205C09}" type="datetimeFigureOut">
               <a:rPr lang="en-US" smtClean="0"/>
               <a:pPr/>
-              <a:t>3/3/2025</a:t>
+              <a:t>10/16/2025</a:t>
             </a:fld>
             <a:endParaRPr lang="en-US"/>
           </a:p>
@@ -1235,7 +579,7 @@
             <a:fld id="{1D8BD707-D9CF-40AE-B4C6-C98DA3205C09}" type="datetimeFigureOut">
               <a:rPr lang="en-US" smtClean="0"/>
               <a:pPr/>
-              <a:t>3/3/2025</a:t>
+              <a:t>10/16/2025</a:t>
             </a:fld>
             <a:endParaRPr lang="en-US"/>
           </a:p>
@@ -1410,7 +754,7 @@
             <a:fld id="{1D8BD707-D9CF-40AE-B4C6-C98DA3205C09}" type="datetimeFigureOut">
               <a:rPr lang="en-US" smtClean="0"/>
               <a:pPr/>
-              <a:t>3/3/2025</a:t>
+              <a:t>10/16/2025</a:t>
             </a:fld>
             <a:endParaRPr lang="en-US"/>
           </a:p>
@@ -1575,7 +919,7 @@
             <a:fld id="{1D8BD707-D9CF-40AE-B4C6-C98DA3205C09}" type="datetimeFigureOut">
               <a:rPr lang="en-US" smtClean="0"/>
               <a:pPr/>
-              <a:t>3/3/2025</a:t>
+              <a:t>10/16/2025</a:t>
             </a:fld>
             <a:endParaRPr lang="en-US"/>
           </a:p>
@@ -1817,7 +1161,7 @@
             <a:fld id="{1D8BD707-D9CF-40AE-B4C6-C98DA3205C09}" type="datetimeFigureOut">
               <a:rPr lang="en-US" smtClean="0"/>
               <a:pPr/>
-              <a:t>3/3/2025</a:t>
+              <a:t>10/16/2025</a:t>
             </a:fld>
             <a:endParaRPr lang="en-US"/>
           </a:p>
@@ -2099,7 +1443,7 @@
             <a:fld id="{1D8BD707-D9CF-40AE-B4C6-C98DA3205C09}" type="datetimeFigureOut">
               <a:rPr lang="en-US" smtClean="0"/>
               <a:pPr/>
-              <a:t>3/3/2025</a:t>
+              <a:t>10/16/2025</a:t>
             </a:fld>
             <a:endParaRPr lang="en-US"/>
           </a:p>
@@ -2515,7 +1859,7 @@
             <a:fld id="{1D8BD707-D9CF-40AE-B4C6-C98DA3205C09}" type="datetimeFigureOut">
               <a:rPr lang="en-US" smtClean="0"/>
               <a:pPr/>
-              <a:t>3/3/2025</a:t>
+              <a:t>10/16/2025</a:t>
             </a:fld>
             <a:endParaRPr lang="en-US"/>
           </a:p>
@@ -2629,7 +1973,7 @@
             <a:fld id="{1D8BD707-D9CF-40AE-B4C6-C98DA3205C09}" type="datetimeFigureOut">
               <a:rPr lang="en-US" smtClean="0"/>
               <a:pPr/>
-              <a:t>3/3/2025</a:t>
+              <a:t>10/16/2025</a:t>
             </a:fld>
             <a:endParaRPr lang="en-US"/>
           </a:p>
@@ -2721,7 +2065,7 @@
             <a:fld id="{1D8BD707-D9CF-40AE-B4C6-C98DA3205C09}" type="datetimeFigureOut">
               <a:rPr lang="en-US" smtClean="0"/>
               <a:pPr/>
-              <a:t>3/3/2025</a:t>
+              <a:t>10/16/2025</a:t>
             </a:fld>
             <a:endParaRPr lang="en-US"/>
           </a:p>
@@ -2993,7 +2337,7 @@
             <a:fld id="{1D8BD707-D9CF-40AE-B4C6-C98DA3205C09}" type="datetimeFigureOut">
               <a:rPr lang="en-US" smtClean="0"/>
               <a:pPr/>
-              <a:t>3/3/2025</a:t>
+              <a:t>10/16/2025</a:t>
             </a:fld>
             <a:endParaRPr lang="en-US"/>
           </a:p>
@@ -3242,7 +2586,7 @@
             <a:fld id="{1D8BD707-D9CF-40AE-B4C6-C98DA3205C09}" type="datetimeFigureOut">
               <a:rPr lang="en-US" smtClean="0"/>
               <a:pPr/>
-              <a:t>3/3/2025</a:t>
+              <a:t>10/16/2025</a:t>
             </a:fld>
             <a:endParaRPr lang="en-US"/>
           </a:p>
@@ -3450,7 +2794,7 @@
             <a:fld id="{1D8BD707-D9CF-40AE-B4C6-C98DA3205C09}" type="datetimeFigureOut">
               <a:rPr lang="en-US" smtClean="0"/>
               <a:pPr/>
-              <a:t>3/3/2025</a:t>
+              <a:t>10/16/2025</a:t>
             </a:fld>
             <a:endParaRPr lang="en-US"/>
           </a:p>
@@ -4246,7 +3590,7 @@
               </a:lnSpc>
             </a:pPr>
             <a:r xmlns:a="http://schemas.openxmlformats.org/drawingml/2006/main">
-              <a:rPr lang="es" sz="10399" noProof="0" dirty="0">
+              <a:rPr lang="en" sz="10399" noProof="0" dirty="0">
                 <a:solidFill>
                   <a:srgbClr val="733EF6"/>
                 </a:solidFill>
@@ -4255,20 +3599,20 @@
                 <a:cs typeface="Buffalo"/>
                 <a:sym typeface="Buffalo"/>
               </a:rPr>
-              <a:t>¡Hagamos de hackers!</a:t>
+              <a:t>Let's play hackers!</a:t>
             </a:r>
           </a:p>
           <a:p>
             <a:pPr xmlns:a="http://schemas.openxmlformats.org/drawingml/2006/main" algn="ctr"/>
             <a:r xmlns:a="http://schemas.openxmlformats.org/drawingml/2006/main">
-              <a:rPr lang="es" sz="4000" noProof="0" dirty="0">
+              <a:rPr lang="en" sz="4000" noProof="0" dirty="0">
                 <a:solidFill>
                   <a:srgbClr val="000000"/>
                 </a:solidFill>
                 <a:latin typeface="Garet Light"/>
                 <a:sym typeface="Buffalo"/>
               </a:rPr>
-              <a:t>¿Cómo crear una contraseña segura?</a:t>
+              <a:t>How to create a secure password?</a:t>
             </a:r>
           </a:p>
         </p:txBody>
@@ -4300,7 +3644,7 @@
               </a:lnSpc>
             </a:pPr>
             <a:r xmlns:a="http://schemas.openxmlformats.org/drawingml/2006/main">
-              <a:rPr lang="es" sz="3000" noProof="0" dirty="0">
+              <a:rPr lang="en" sz="3000" noProof="0" dirty="0">
                 <a:solidFill>
                   <a:srgbClr val="F87354"/>
                 </a:solidFill>
@@ -4309,7 +3653,7 @@
                 <a:cs typeface="White Star"/>
                 <a:sym typeface="White Star"/>
               </a:rPr>
-              <a:t>Alumno:</a:t>
+              <a:t>Student:</a:t>
             </a:r>
           </a:p>
           <a:p>
@@ -4319,7 +3663,7 @@
               </a:lnSpc>
             </a:pPr>
             <a:r xmlns:a="http://schemas.openxmlformats.org/drawingml/2006/main">
-              <a:rPr lang="es" sz="1500" noProof="0" dirty="0">
+              <a:rPr lang="en" sz="1500" noProof="0" dirty="0">
                 <a:solidFill>
                   <a:srgbClr val="F87354"/>
                 </a:solidFill>
@@ -4328,7 +3672,7 @@
                 <a:cs typeface="White Star"/>
                 <a:sym typeface="White Star"/>
               </a:rPr>
-              <a:t>___ _ _ _ _ _ _ _ _ _ _ _ _ _ _ _ _ _ _ _ _ _ _ _ _ _ _ _ _ _ _ _ _ _ _ _ _ _ _ _ _ _ _ _ _ _ _ _ _ _ _ _ _ _</a:t>
+              <a:t>___ _</a:t>
             </a:r>
           </a:p>
           <a:p>
@@ -4406,6 +3750,52 @@
           </a:extLst>
         </p:spPr>
       </p:pic>
+      <p:pic>
+        <p:nvPicPr>
+          <p:cNvPr id="12" name="Picture 11" descr="A grey square with white text&#10;&#10;AI-generated content may be incorrect.">
+            <a:extLst>
+              <a:ext uri="{FF2B5EF4-FFF2-40B4-BE49-F238E27FC236}">
+                <a16:creationId xmlns:a16="http://schemas.microsoft.com/office/drawing/2014/main" id="{2ADF4236-C311-988C-1EAF-F33444BF8989}"/>
+              </a:ext>
+            </a:extLst>
+          </p:cNvPr>
+          <p:cNvPicPr>
+            <a:picLocks noChangeAspect="1"/>
+          </p:cNvPicPr>
+          <p:nvPr/>
+        </p:nvPicPr>
+        <p:blipFill rotWithShape="1">
+          <a:blip r:embed="rId10">
+            <a:extLst>
+              <a:ext uri="{28A0092B-C50C-407E-A947-70E740481C1C}">
+                <a14:useLocalDpi xmlns:a14="http://schemas.microsoft.com/office/drawing/2010/main" val="0"/>
+              </a:ext>
+            </a:extLst>
+          </a:blip>
+          <a:srcRect r="18171" b="16231"/>
+          <a:stretch>
+            <a:fillRect/>
+          </a:stretch>
+        </p:blipFill>
+        <p:spPr bwMode="auto">
+          <a:xfrm>
+            <a:off x="815845" y="9356962"/>
+            <a:ext cx="2092960" cy="556895"/>
+          </a:xfrm>
+          <a:prstGeom prst="rect">
+            <a:avLst/>
+          </a:prstGeom>
+          <a:noFill/>
+          <a:ln>
+            <a:noFill/>
+          </a:ln>
+          <a:extLst>
+            <a:ext uri="{53640926-AAD7-44D8-BBD7-CCE9431645EC}">
+              <a14:shadowObscured xmlns:a14="http://schemas.microsoft.com/office/drawing/2010/main"/>
+            </a:ext>
+          </a:extLst>
+        </p:spPr>
+      </p:pic>
     </p:spTree>
   </p:cSld>
   <p:clrMapOvr>
@@ -4827,7 +4217,7 @@
           <a:p>
             <a:pPr xmlns:a="http://schemas.openxmlformats.org/drawingml/2006/main" algn="ctr"/>
             <a:r xmlns:a="http://schemas.openxmlformats.org/drawingml/2006/main">
-              <a:rPr lang="es" sz="2000" noProof="0" dirty="0">
+              <a:rPr lang="en" sz="2000" noProof="0" dirty="0">
                 <a:solidFill>
                   <a:srgbClr val="000000"/>
                 </a:solidFill>
@@ -4836,7 +4226,7 @@
                 <a:cs typeface="Cocomat Pro"/>
                 <a:sym typeface="Cocomat Pro"/>
               </a:rPr>
-              <a:t>Cuando debemos crear contraseñas, nos encontramos con diferentes indicaciones según la aplicación o la web.</a:t>
+              <a:t>When we have to create passwords, we find different instructions depending on the application or website.</a:t>
             </a:r>
           </a:p>
         </p:txBody>
@@ -5871,7 +5261,7 @@
               </a:spcBef>
             </a:pPr>
             <a:r xmlns:a="http://schemas.openxmlformats.org/drawingml/2006/main">
-              <a:rPr lang="es" sz="4000" noProof="0" dirty="0">
+              <a:rPr lang="en" sz="4000" noProof="0" dirty="0">
                 <a:solidFill>
                   <a:srgbClr val="000000"/>
                 </a:solidFill>
@@ -5880,7 +5270,7 @@
                 <a:cs typeface="Buffalo"/>
                 <a:sym typeface="Buffalo"/>
               </a:rPr>
-              <a:t>¿Cuáles te parecen más seguras? Porque?</a:t>
+              <a:t>Which ones do you think are safer? Why?</a:t>
             </a:r>
           </a:p>
         </p:txBody>
@@ -5931,7 +5321,7 @@
               <a:buNone/>
             </a:pPr>
             <a:r xmlns:a="http://schemas.openxmlformats.org/drawingml/2006/main">
-              <a:rPr lang="es" sz="1500" b="1" noProof="0" dirty="0">
+              <a:rPr lang="en" sz="1500" b="1" noProof="0" dirty="0">
                 <a:solidFill>
                   <a:schemeClr val="dk1"/>
                 </a:solidFill>
@@ -5940,7 +5330,7 @@
                 <a:cs typeface="Avenir"/>
                 <a:sym typeface="Avenir"/>
               </a:rPr>
-              <a:t>PUK MÓVIL </a:t>
+              <a:t>MOBILE PUK </a:t>
             </a:r>
             <a:br xmlns:a="http://schemas.openxmlformats.org/drawingml/2006/main">
               <a:rPr lang="ca-ES" sz="1500" noProof="0" dirty="0">
@@ -5954,7 +5344,7 @@
               </a:rPr>
             </a:br>
             <a:r xmlns:a="http://schemas.openxmlformats.org/drawingml/2006/main">
-              <a:rPr lang="es" sz="1500" noProof="0" dirty="0">
+              <a:rPr lang="en" sz="1500" noProof="0" dirty="0">
                 <a:solidFill>
                   <a:schemeClr val="dk1"/>
                 </a:solidFill>
@@ -5963,7 +5353,7 @@
                 <a:cs typeface="Avenir"/>
                 <a:sym typeface="Avenir"/>
               </a:rPr>
-              <a:t>8 números</a:t>
+              <a:t>8 numbers</a:t>
             </a:r>
           </a:p>
         </p:txBody>
@@ -6014,7 +5404,7 @@
               <a:buNone/>
             </a:pPr>
             <a:r xmlns:a="http://schemas.openxmlformats.org/drawingml/2006/main">
-              <a:rPr lang="es" sz="1500" b="1" noProof="0" dirty="0">
+              <a:rPr lang="en" sz="1500" b="1" noProof="0" dirty="0">
                 <a:solidFill>
                   <a:schemeClr val="dk1"/>
                 </a:solidFill>
@@ -6023,10 +5413,10 @@
                 <a:cs typeface="Avenir"/>
                 <a:sym typeface="Avenir"/>
               </a:rPr>
-              <a:t>CORREO INSTITUTO </a:t>
+              <a:t>INSTITUTE MAIL </a:t>
             </a:r>
             <a:r xmlns:a="http://schemas.openxmlformats.org/drawingml/2006/main">
-              <a:rPr lang="es" sz="1500" noProof="0" dirty="0">
+              <a:rPr lang="en" sz="1500" noProof="0" dirty="0">
                 <a:solidFill>
                   <a:schemeClr val="dk1"/>
                 </a:solidFill>
@@ -6035,7 +5425,7 @@
                 <a:cs typeface="Avenir"/>
                 <a:sym typeface="Avenir"/>
               </a:rPr>
-              <a:t>: 8 elementos mínimo, alfanumérico, mínimo una mayúscula o un carácter especial</a:t>
+              <a:t>: 8 elements minimum, alphanumeric, at least one capital letter or a special character</a:t>
             </a:r>
           </a:p>
         </p:txBody>
@@ -6086,7 +5476,7 @@
               <a:buNone/>
             </a:pPr>
             <a:r xmlns:a="http://schemas.openxmlformats.org/drawingml/2006/main">
-              <a:rPr lang="es" sz="1500" b="1" noProof="0" dirty="0">
+              <a:rPr lang="en" sz="1500" b="1" noProof="0" dirty="0">
                 <a:solidFill>
                   <a:schemeClr val="dk1"/>
                 </a:solidFill>
@@ -6095,10 +5485,10 @@
                 <a:cs typeface="Avenir"/>
                 <a:sym typeface="Avenir"/>
               </a:rPr>
-              <a:t>CORREO PROFESO </a:t>
+              <a:t>TEACHER EMAIL </a:t>
             </a:r>
             <a:r xmlns:a="http://schemas.openxmlformats.org/drawingml/2006/main">
-              <a:rPr lang="es" sz="1500" noProof="0" dirty="0">
+              <a:rPr lang="en" sz="1500" noProof="0" dirty="0">
                 <a:solidFill>
                   <a:schemeClr val="dk1"/>
                 </a:solidFill>
@@ -6107,7 +5497,7 @@
                 <a:cs typeface="Avenir"/>
                 <a:sym typeface="Avenir"/>
               </a:rPr>
-              <a:t>: 8 elementos mínimo, alfanumérico, mínimo una mayúscula, una minúscula y un número</a:t>
+              <a:t>: 8 elements minimum, alphanumeric, at least one uppercase letter, one lowercase letter and one number</a:t>
             </a:r>
           </a:p>
         </p:txBody>
@@ -6158,7 +5548,7 @@
               <a:buNone/>
             </a:pPr>
             <a:r xmlns:a="http://schemas.openxmlformats.org/drawingml/2006/main">
-              <a:rPr lang="es" sz="1500" b="1" noProof="0" dirty="0">
+              <a:rPr lang="en" sz="1500" b="1" noProof="0" dirty="0">
                 <a:solidFill>
                   <a:schemeClr val="dk1"/>
                 </a:solidFill>
@@ -6170,7 +5560,7 @@
               <a:t>GMAIL </a:t>
             </a:r>
             <a:r xmlns:a="http://schemas.openxmlformats.org/drawingml/2006/main">
-              <a:rPr lang="es" sz="1500" noProof="0" dirty="0">
+              <a:rPr lang="en" sz="1500" noProof="0" dirty="0">
                 <a:solidFill>
                   <a:schemeClr val="dk1"/>
                 </a:solidFill>
@@ -6179,7 +5569,7 @@
                 <a:cs typeface="Avenir"/>
                 <a:sym typeface="Avenir"/>
               </a:rPr>
-              <a:t>: 8 elementos mínimo con letras mayúsculas, minúsculas, números y caracteres especiales (como se desee)</a:t>
+              <a:t>: 8 elements minimum with uppercase, lowercase letters, numbers and special characters (as desired)</a:t>
             </a:r>
           </a:p>
         </p:txBody>
@@ -6230,7 +5620,7 @@
               <a:buNone/>
             </a:pPr>
             <a:r xmlns:a="http://schemas.openxmlformats.org/drawingml/2006/main">
-              <a:rPr lang="es" sz="1500" b="1" noProof="0" dirty="0">
+              <a:rPr lang="en" sz="1500" b="1" noProof="0" dirty="0">
                 <a:solidFill>
                   <a:schemeClr val="dk1"/>
                 </a:solidFill>
@@ -6239,10 +5629,10 @@
                 <a:cs typeface="Avenir"/>
                 <a:sym typeface="Avenir"/>
               </a:rPr>
-              <a:t>CORREO INFANTIL </a:t>
+              <a:t>CHILDREN'S MAIL </a:t>
             </a:r>
             <a:r xmlns:a="http://schemas.openxmlformats.org/drawingml/2006/main">
-              <a:rPr lang="es" sz="1500" noProof="0" dirty="0">
+              <a:rPr lang="en" sz="1500" noProof="0" dirty="0">
                 <a:solidFill>
                   <a:schemeClr val="dk1"/>
                 </a:solidFill>
@@ -6251,7 +5641,7 @@
                 <a:cs typeface="Avenir"/>
                 <a:sym typeface="Avenir"/>
               </a:rPr>
-              <a:t>: 8 elementos, 4 letras mayúsculas seguidas de 4 números</a:t>
+              <a:t>: 8 elements, 4 capital letters followed by 4 numbers</a:t>
             </a:r>
           </a:p>
         </p:txBody>
@@ -6302,7 +5692,7 @@
               <a:buNone/>
             </a:pPr>
             <a:r xmlns:a="http://schemas.openxmlformats.org/drawingml/2006/main">
-              <a:rPr lang="es" sz="1500" b="1" noProof="0" dirty="0">
+              <a:rPr lang="en" sz="1500" b="1" noProof="0" dirty="0">
                 <a:solidFill>
                   <a:schemeClr val="dk1"/>
                 </a:solidFill>
@@ -6311,10 +5701,10 @@
                 <a:cs typeface="Avenir"/>
                 <a:sym typeface="Avenir"/>
               </a:rPr>
-              <a:t>PIN BANCO </a:t>
+              <a:t>BANK PIN </a:t>
             </a:r>
             <a:r xmlns:a="http://schemas.openxmlformats.org/drawingml/2006/main">
-              <a:rPr lang="es" sz="1500" noProof="0" dirty="0">
+              <a:rPr lang="en" sz="1500" noProof="0" dirty="0">
                 <a:solidFill>
                   <a:schemeClr val="dk1"/>
                 </a:solidFill>
@@ -6323,7 +5713,7 @@
                 <a:cs typeface="Avenir"/>
                 <a:sym typeface="Avenir"/>
               </a:rPr>
-              <a:t>: 8 letras minúsculas</a:t>
+              <a:t>: 8 lowercase letters</a:t>
             </a:r>
           </a:p>
         </p:txBody>
@@ -6474,7 +5864,7 @@
               </a:lnSpc>
             </a:pPr>
             <a:r xmlns:a="http://schemas.openxmlformats.org/drawingml/2006/main">
-              <a:rPr lang="es" sz="5499" noProof="0" dirty="0">
+              <a:rPr lang="en" sz="5499" noProof="0" dirty="0">
                 <a:solidFill>
                   <a:srgbClr val="733EF6"/>
                 </a:solidFill>
@@ -6483,7 +5873,7 @@
                 <a:cs typeface="Buffalo"/>
                 <a:sym typeface="Buffalo"/>
               </a:rPr>
-              <a:t>Comparación de contraseñas</a:t>
+              <a:t>Password comparison</a:t>
             </a:r>
           </a:p>
         </p:txBody>
@@ -6969,7 +6359,7 @@
           <a:p>
             <a:pPr xmlns:a="http://schemas.openxmlformats.org/drawingml/2006/main" algn="ctr"/>
             <a:r xmlns:a="http://schemas.openxmlformats.org/drawingml/2006/main">
-              <a:rPr lang="es" sz="2000" noProof="0" dirty="0">
+              <a:rPr lang="en" sz="2000" noProof="0" dirty="0">
                 <a:solidFill>
                   <a:srgbClr val="000000"/>
                 </a:solidFill>
@@ -6978,7 +6368,7 @@
                 <a:cs typeface="Cocomat Pro"/>
                 <a:sym typeface="Cocomat Pro"/>
               </a:rPr>
-              <a:t>Espacio de trabajo (apuntes, cálculos, esquemas,...)</a:t>
+              <a:t>Workspace (notes, calculations, diagrams,...)</a:t>
             </a:r>
           </a:p>
         </p:txBody>
@@ -9778,7 +9168,7 @@
               </a:lnSpc>
             </a:pPr>
             <a:r xmlns:a="http://schemas.openxmlformats.org/drawingml/2006/main">
-              <a:rPr lang="es" sz="5499" noProof="0" dirty="0">
+              <a:rPr lang="en" sz="5499" noProof="0" dirty="0">
                 <a:solidFill>
                   <a:srgbClr val="733EF6"/>
                 </a:solidFill>
@@ -9787,7 +9177,7 @@
                 <a:cs typeface="Buffalo"/>
                 <a:sym typeface="Buffalo"/>
               </a:rPr>
-              <a:t>Comparación de contraseñas</a:t>
+              <a:t>Password comparison</a:t>
             </a:r>
           </a:p>
         </p:txBody>
@@ -10506,7 +9896,7 @@
               </a:lnSpc>
             </a:pPr>
             <a:r xmlns:a="http://schemas.openxmlformats.org/drawingml/2006/main">
-              <a:rPr lang="es" sz="5499" noProof="0" dirty="0">
+              <a:rPr lang="en" sz="5499" noProof="0" dirty="0">
                 <a:solidFill>
                   <a:srgbClr val="733EF6"/>
                 </a:solidFill>
@@ -10515,7 +9905,7 @@
                 <a:cs typeface="Buffalo"/>
                 <a:sym typeface="Buffalo"/>
               </a:rPr>
-              <a:t>Comparación de contraseñas</a:t>
+              <a:t>Password comparison</a:t>
             </a:r>
           </a:p>
         </p:txBody>
@@ -10549,7 +9939,7 @@
           <a:p>
             <a:pPr xmlns:a="http://schemas.openxmlformats.org/drawingml/2006/main" algn="ctr"/>
             <a:r xmlns:a="http://schemas.openxmlformats.org/drawingml/2006/main">
-              <a:rPr lang="es" sz="2000" noProof="0" dirty="0">
+              <a:rPr lang="en" sz="2000" noProof="0" dirty="0">
                 <a:solidFill>
                   <a:srgbClr val="000000"/>
                 </a:solidFill>
@@ -10558,13 +9948,13 @@
                 <a:cs typeface="Cocomat Pro"/>
                 <a:sym typeface="Cocomat Pro"/>
               </a:rPr>
-              <a:t>Ordene las contraseñas de menos a más seguras.</a:t>
+              <a:t>Sort passwords from least to most secure.</a:t>
             </a:r>
           </a:p>
           <a:p>
             <a:pPr xmlns:a="http://schemas.openxmlformats.org/drawingml/2006/main" algn="ctr"/>
             <a:r xmlns:a="http://schemas.openxmlformats.org/drawingml/2006/main">
-              <a:rPr lang="es" sz="2000" noProof="0" dirty="0">
+              <a:rPr lang="en" sz="2000" noProof="0" dirty="0">
                 <a:solidFill>
                   <a:srgbClr val="000000"/>
                 </a:solidFill>
@@ -10573,7 +9963,7 @@
                 <a:cs typeface="Cocomat Pro"/>
                 <a:sym typeface="Cocomat Pro"/>
               </a:rPr>
-              <a:t>Justifique sus respuestas.</a:t>
+              <a:t>Justify your answers.</a:t>
             </a:r>
           </a:p>
           <a:p>
@@ -13918,7 +13308,7 @@
               </a:lnSpc>
             </a:pPr>
             <a:r xmlns:a="http://schemas.openxmlformats.org/drawingml/2006/main">
-              <a:rPr lang="es" sz="5499" noProof="0" dirty="0">
+              <a:rPr lang="en" sz="5499" noProof="0" dirty="0">
                 <a:solidFill>
                   <a:srgbClr val="733EF6"/>
                 </a:solidFill>
@@ -13927,7 +13317,7 @@
                 <a:cs typeface="Buffalo"/>
                 <a:sym typeface="Buffalo"/>
               </a:rPr>
-              <a:t>Creación de contraseñas</a:t>
+              <a:t>Creating passwords</a:t>
             </a:r>
           </a:p>
         </p:txBody>
@@ -13961,7 +13351,7 @@
           <a:p>
             <a:pPr xmlns:a="http://schemas.openxmlformats.org/drawingml/2006/main" algn="ctr"/>
             <a:r xmlns:a="http://schemas.openxmlformats.org/drawingml/2006/main">
-              <a:rPr lang="es" sz="2000" noProof="0" dirty="0">
+              <a:rPr lang="en" sz="2000" noProof="0" dirty="0">
                 <a:solidFill>
                   <a:srgbClr val="000000"/>
                 </a:solidFill>
@@ -13970,7 +13360,7 @@
                 <a:cs typeface="Cocomat Pro"/>
                 <a:sym typeface="Cocomat Pro"/>
               </a:rPr>
-              <a:t>Haga una propuesta de creación de contraseña por el correo del instituto y justifique por qué es segura</a:t>
+              <a:t>Make a proposal for creating a password for the institute's email and justify why it is secure enough.</a:t>
             </a:r>
           </a:p>
         </p:txBody>
@@ -17170,7 +16560,7 @@
               </a:lnSpc>
             </a:pPr>
             <a:r xmlns:a="http://schemas.openxmlformats.org/drawingml/2006/main">
-              <a:rPr lang="es" sz="5499" noProof="0" dirty="0">
+              <a:rPr lang="en" sz="5499" noProof="0" dirty="0">
                 <a:solidFill>
                   <a:srgbClr val="733EF6"/>
                 </a:solidFill>
@@ -17179,7 +16569,7 @@
                 <a:cs typeface="Buffalo"/>
                 <a:sym typeface="Buffalo"/>
               </a:rPr>
-              <a:t>Rúbrica de evaluación</a:t>
+              <a:t>Evaluation rubric</a:t>
             </a:r>
           </a:p>
         </p:txBody>
@@ -17213,7 +16603,7 @@
           <a:lstStyle/>
           <a:p>
             <a:r xmlns:a="http://schemas.openxmlformats.org/drawingml/2006/main">
-              <a:rPr lang="es" sz="4000" noProof="0" dirty="0">
+              <a:rPr lang="en" sz="4000" noProof="0" dirty="0">
                 <a:solidFill>
                   <a:srgbClr val="733EF6"/>
                 </a:solidFill>
@@ -17280,8 +16670,8 @@
                     <a:p>
                       <a:pPr xmlns:a="http://schemas.openxmlformats.org/drawingml/2006/main" algn="ctr"/>
                       <a:r xmlns:a="http://schemas.openxmlformats.org/drawingml/2006/main">
-                        <a:rPr lang="es" sz="1500" b="1" noProof="0" dirty="0"/>
-                        <a:t>Aspecto a revisar</a:t>
+                        <a:rPr lang="en" sz="1500" b="1" noProof="0" dirty="0"/>
+                        <a:t>Aspect to review</a:t>
                       </a:r>
                       <a:endParaRPr xmlns:a="http://schemas.openxmlformats.org/drawingml/2006/main" lang="ca-ES" sz="1500" noProof="0" dirty="0"/>
                     </a:p>
@@ -17312,8 +16702,8 @@
                         <a:buNone/>
                       </a:pPr>
                       <a:r xmlns:a="http://schemas.openxmlformats.org/drawingml/2006/main">
-                        <a:rPr lang="es" sz="1500" b="1" noProof="0" dirty="0"/>
-                        <a:t>¿Qué he hecho?</a:t>
+                        <a:rPr lang="en" sz="1500" b="1" noProof="0" dirty="0"/>
+                        <a:t>What have I done?</a:t>
                       </a:r>
                       <a:endParaRPr xmlns:a="http://schemas.openxmlformats.org/drawingml/2006/main" lang="ca-ES" sz="1500" noProof="0" dirty="0"/>
                     </a:p>
@@ -17348,8 +16738,8 @@
                     <a:p>
                       <a:pPr xmlns:a="http://schemas.openxmlformats.org/drawingml/2006/main" algn="ctr"/>
                       <a:r xmlns:a="http://schemas.openxmlformats.org/drawingml/2006/main">
-                        <a:rPr lang="es" sz="1500" b="1" noProof="0" dirty="0"/>
-                        <a:t>1. Análisis e interpretación de datos</a:t>
+                        <a:rPr lang="en" sz="1500" b="1" noProof="0" dirty="0"/>
+                        <a:t>1. Data analysis and interpretation</a:t>
                       </a:r>
                       <a:endParaRPr xmlns:a="http://schemas.openxmlformats.org/drawingml/2006/main" lang="ca-ES" sz="1500" noProof="0" dirty="0"/>
                     </a:p>
@@ -17386,8 +16776,8 @@
                         <a:buChar char="q"/>
                       </a:pPr>
                       <a:r xmlns:a="http://schemas.openxmlformats.org/drawingml/2006/main">
-                        <a:rPr lang="es" sz="1800" noProof="0" dirty="0"/>
-                        <a:t>Considero ejemplos concretos de contraseñas de cada tipo.</a:t>
+                        <a:rPr lang="en" sz="1800" noProof="0" dirty="0"/>
+                        <a:t>I consider specific examples of passwords of each type.</a:t>
                       </a:r>
                     </a:p>
                     <a:p>
@@ -17396,8 +16786,8 @@
                         <a:buChar char="q"/>
                       </a:pPr>
                       <a:r xmlns:a="http://schemas.openxmlformats.org/drawingml/2006/main">
-                        <a:rPr lang="es" sz="1800" noProof="0" dirty="0"/>
-                        <a:t>Utilizo listas, tablas o diagramas para organizar los datos y estar seguro/a que estoy contando todos los casos.</a:t>
+                        <a:rPr lang="en" sz="1800" noProof="0" dirty="0"/>
+                        <a:t>I use lists, tables or diagrams to organize the data and make sure I am counting all the cases.</a:t>
                       </a:r>
                     </a:p>
                   </a:txBody>
@@ -17437,8 +16827,8 @@
                     <a:p>
                       <a:pPr xmlns:a="http://schemas.openxmlformats.org/drawingml/2006/main" algn="ctr"/>
                       <a:r xmlns:a="http://schemas.openxmlformats.org/drawingml/2006/main">
-                        <a:rPr lang="es" sz="1500" b="1" noProof="0" dirty="0"/>
-                        <a:t>2. Pensamiento computacional</a:t>
+                        <a:rPr lang="en" sz="1500" b="1" noProof="0" dirty="0"/>
+                        <a:t>2. Computational thinking</a:t>
                       </a:r>
                       <a:endParaRPr xmlns:a="http://schemas.openxmlformats.org/drawingml/2006/main" lang="ca-ES" sz="1500" noProof="0" dirty="0"/>
                     </a:p>
@@ -17481,8 +16871,8 @@
                         <a:buChar char="q"/>
                       </a:pPr>
                       <a:r xmlns:a="http://schemas.openxmlformats.org/drawingml/2006/main">
-                        <a:rPr lang="es" sz="1800" noProof="0" dirty="0"/>
-                        <a:t>Asocio cada contraseña con: un tipo de candado, un cálculo general o una fórmula.</a:t>
+                        <a:rPr lang="en" sz="1800" noProof="0" dirty="0"/>
+                        <a:t>I associate each password with: a type of padlock, a general calculation or a formula.</a:t>
                       </a:r>
                     </a:p>
                     <a:p>
@@ -17491,8 +16881,8 @@
                         <a:buChar char="q"/>
                       </a:pPr>
                       <a:r xmlns:a="http://schemas.openxmlformats.org/drawingml/2006/main">
-                        <a:rPr lang="es" sz="1800" noProof="0" dirty="0"/>
-                        <a:t>Considero unos pasos concretos para organizar los cálculos.</a:t>
+                        <a:rPr lang="en" sz="1800" noProof="0" dirty="0"/>
+                        <a:t>I consider some specific steps to organize the calculations.</a:t>
                       </a:r>
                     </a:p>
                     <a:p>
@@ -17501,8 +16891,8 @@
                         <a:buChar char="q"/>
                       </a:pPr>
                       <a:r xmlns:a="http://schemas.openxmlformats.org/drawingml/2006/main">
-                        <a:rPr lang="es" sz="1800" noProof="0" dirty="0"/>
-                        <a:t>Calculo el número total de contraseñas de cada tipo.</a:t>
+                        <a:rPr lang="en" sz="1800" noProof="0" dirty="0"/>
+                        <a:t>I calculate the total number of passwords of each type.</a:t>
                       </a:r>
                     </a:p>
                   </a:txBody>
@@ -17548,8 +16938,8 @@
                     <a:p>
                       <a:pPr xmlns:a="http://schemas.openxmlformats.org/drawingml/2006/main" algn="ctr"/>
                       <a:r xmlns:a="http://schemas.openxmlformats.org/drawingml/2006/main">
-                        <a:rPr lang="es" sz="1500" b="1" noProof="0" dirty="0"/>
-                        <a:t>3. Argumentación y verificación</a:t>
+                        <a:rPr lang="en" sz="1500" b="1" noProof="0" dirty="0"/>
+                        <a:t>3. Argumentation and verification</a:t>
                       </a:r>
                       <a:endParaRPr xmlns:a="http://schemas.openxmlformats.org/drawingml/2006/main" lang="ca-ES" sz="1500" noProof="0" dirty="0"/>
                     </a:p>
@@ -17592,8 +16982,8 @@
                         <a:buChar char="q"/>
                       </a:pPr>
                       <a:r xmlns:a="http://schemas.openxmlformats.org/drawingml/2006/main">
-                        <a:rPr lang="es" sz="1800" noProof="0" dirty="0"/>
-                        <a:t>Cuento por qué una contraseña es más segura que otra, utilizando argumentos generales o cálculos.</a:t>
+                        <a:rPr lang="en" sz="1800" noProof="0" dirty="0"/>
+                        <a:t>I explain why one password is more secure than another, using general arguments or calculations.</a:t>
                       </a:r>
                     </a:p>
                     <a:p>
@@ -17602,8 +16992,8 @@
                         <a:buChar char="q"/>
                       </a:pPr>
                       <a:r xmlns:a="http://schemas.openxmlformats.org/drawingml/2006/main">
-                        <a:rPr lang="es" sz="1800" noProof="0" dirty="0"/>
-                        <a:t>Reviso los resultados para asegurarme de que no existen errores.</a:t>
+                        <a:rPr lang="en" sz="1800" noProof="0" dirty="0"/>
+                        <a:t>I review the results to make sure there are no errors.</a:t>
                       </a:r>
                     </a:p>
                     <a:p>
@@ -17612,8 +17002,8 @@
                         <a:buChar char="q"/>
                       </a:pPr>
                       <a:r xmlns:a="http://schemas.openxmlformats.org/drawingml/2006/main">
-                        <a:rPr lang="es" sz="1800" noProof="0" dirty="0"/>
-                        <a:t>Busco otras formas de resolver el problema para confirmar la respuesta.</a:t>
+                        <a:rPr lang="en" sz="1800" noProof="0" dirty="0"/>
+                        <a:t>I am looking for other ways to solve the problem to confirm the answer.</a:t>
                       </a:r>
                     </a:p>
                   </a:txBody>
@@ -17659,8 +17049,8 @@
                     <a:p>
                       <a:pPr xmlns:a="http://schemas.openxmlformats.org/drawingml/2006/main" algn="ctr"/>
                       <a:r xmlns:a="http://schemas.openxmlformats.org/drawingml/2006/main">
-                        <a:rPr lang="es" sz="1500" b="1" noProof="0" dirty="0"/>
-                        <a:t>4. Comunicación matemática</a:t>
+                        <a:rPr lang="en" sz="1500" b="1" noProof="0" dirty="0"/>
+                        <a:t>4. Mathematical communication</a:t>
                       </a:r>
                       <a:endParaRPr xmlns:a="http://schemas.openxmlformats.org/drawingml/2006/main" lang="ca-ES" sz="1500" noProof="0" dirty="0"/>
                     </a:p>
@@ -17697,8 +17087,8 @@
                         <a:buChar char="q"/>
                       </a:pPr>
                       <a:r xmlns:a="http://schemas.openxmlformats.org/drawingml/2006/main">
-                        <a:rPr lang="es" sz="1800" noProof="0" dirty="0"/>
-                        <a:t>Cuento con claridad los pasos que sigo.</a:t>
+                        <a:rPr lang="en" sz="1800" noProof="0" dirty="0"/>
+                        <a:t>I clearly explain the steps I follow.</a:t>
                       </a:r>
                     </a:p>
                     <a:p>
@@ -17707,8 +17097,8 @@
                         <a:buChar char="q"/>
                       </a:pPr>
                       <a:r xmlns:a="http://schemas.openxmlformats.org/drawingml/2006/main">
-                        <a:rPr lang="es" sz="1800" noProof="0" dirty="0"/>
-                        <a:t>Utilizo un lenguaje matemático adecuado.</a:t>
+                        <a:rPr lang="en" sz="1800" noProof="0" dirty="0"/>
+                        <a:t>I use appropriate mathematical language.</a:t>
                       </a:r>
                     </a:p>
                     <a:p>
@@ -17717,8 +17107,8 @@
                         <a:buChar char="q"/>
                       </a:pPr>
                       <a:r xmlns:a="http://schemas.openxmlformats.org/drawingml/2006/main">
-                        <a:rPr lang="es" sz="1800" noProof="0" dirty="0"/>
-                        <a:t>Utilizo esquemas, tablas o diagramas para explicar mejor el proceso.</a:t>
+                        <a:rPr lang="en" sz="1800" noProof="0" dirty="0"/>
+                        <a:t>I use diagrams, tables or charts to better explain the process.</a:t>
                       </a:r>
                     </a:p>
                     <a:p>
@@ -17727,8 +17117,8 @@
                         <a:buChar char="q"/>
                       </a:pPr>
                       <a:r xmlns:a="http://schemas.openxmlformats.org/drawingml/2006/main">
-                        <a:rPr lang="es" sz="1800" noProof="0" dirty="0"/>
-                        <a:t>Reviso si mis explicaciones son coherentes con los cálculos que he realizado.</a:t>
+                        <a:rPr lang="en" sz="1800" noProof="0" dirty="0"/>
+                        <a:t>I check if my explanations are consistent with the calculations I have made.</a:t>
                       </a:r>
                     </a:p>
                   </a:txBody>
